--- a/lecture-slides_upload/lab-activity/6-LinReg-output.pptx
+++ b/lecture-slides_upload/lab-activity/6-LinReg-output.pptx
@@ -274,7 +274,7 @@
           <a:p>
             <a:fld id="{9348304A-BD4A-884F-8142-E1638F7E50E4}" type="datetimeFigureOut">
               <a:rPr lang="en-US" smtClean="0"/>
-              <a:t>2/22/24</a:t>
+              <a:t>10/6/25</a:t>
             </a:fld>
             <a:endParaRPr lang="en-US"/>
           </a:p>
@@ -472,7 +472,7 @@
           <a:p>
             <a:fld id="{9348304A-BD4A-884F-8142-E1638F7E50E4}" type="datetimeFigureOut">
               <a:rPr lang="en-US" smtClean="0"/>
-              <a:t>2/22/24</a:t>
+              <a:t>10/6/25</a:t>
             </a:fld>
             <a:endParaRPr lang="en-US"/>
           </a:p>
@@ -680,7 +680,7 @@
           <a:p>
             <a:fld id="{9348304A-BD4A-884F-8142-E1638F7E50E4}" type="datetimeFigureOut">
               <a:rPr lang="en-US" smtClean="0"/>
-              <a:t>2/22/24</a:t>
+              <a:t>10/6/25</a:t>
             </a:fld>
             <a:endParaRPr lang="en-US"/>
           </a:p>
@@ -878,7 +878,7 @@
           <a:p>
             <a:fld id="{9348304A-BD4A-884F-8142-E1638F7E50E4}" type="datetimeFigureOut">
               <a:rPr lang="en-US" smtClean="0"/>
-              <a:t>2/22/24</a:t>
+              <a:t>10/6/25</a:t>
             </a:fld>
             <a:endParaRPr lang="en-US"/>
           </a:p>
@@ -1153,7 +1153,7 @@
           <a:p>
             <a:fld id="{9348304A-BD4A-884F-8142-E1638F7E50E4}" type="datetimeFigureOut">
               <a:rPr lang="en-US" smtClean="0"/>
-              <a:t>2/22/24</a:t>
+              <a:t>10/6/25</a:t>
             </a:fld>
             <a:endParaRPr lang="en-US"/>
           </a:p>
@@ -1418,7 +1418,7 @@
           <a:p>
             <a:fld id="{9348304A-BD4A-884F-8142-E1638F7E50E4}" type="datetimeFigureOut">
               <a:rPr lang="en-US" smtClean="0"/>
-              <a:t>2/22/24</a:t>
+              <a:t>10/6/25</a:t>
             </a:fld>
             <a:endParaRPr lang="en-US"/>
           </a:p>
@@ -1830,7 +1830,7 @@
           <a:p>
             <a:fld id="{9348304A-BD4A-884F-8142-E1638F7E50E4}" type="datetimeFigureOut">
               <a:rPr lang="en-US" smtClean="0"/>
-              <a:t>2/22/24</a:t>
+              <a:t>10/6/25</a:t>
             </a:fld>
             <a:endParaRPr lang="en-US"/>
           </a:p>
@@ -1971,7 +1971,7 @@
           <a:p>
             <a:fld id="{9348304A-BD4A-884F-8142-E1638F7E50E4}" type="datetimeFigureOut">
               <a:rPr lang="en-US" smtClean="0"/>
-              <a:t>2/22/24</a:t>
+              <a:t>10/6/25</a:t>
             </a:fld>
             <a:endParaRPr lang="en-US"/>
           </a:p>
@@ -2084,7 +2084,7 @@
           <a:p>
             <a:fld id="{9348304A-BD4A-884F-8142-E1638F7E50E4}" type="datetimeFigureOut">
               <a:rPr lang="en-US" smtClean="0"/>
-              <a:t>2/22/24</a:t>
+              <a:t>10/6/25</a:t>
             </a:fld>
             <a:endParaRPr lang="en-US"/>
           </a:p>
@@ -2395,7 +2395,7 @@
           <a:p>
             <a:fld id="{9348304A-BD4A-884F-8142-E1638F7E50E4}" type="datetimeFigureOut">
               <a:rPr lang="en-US" smtClean="0"/>
-              <a:t>2/22/24</a:t>
+              <a:t>10/6/25</a:t>
             </a:fld>
             <a:endParaRPr lang="en-US"/>
           </a:p>
@@ -2683,7 +2683,7 @@
           <a:p>
             <a:fld id="{9348304A-BD4A-884F-8142-E1638F7E50E4}" type="datetimeFigureOut">
               <a:rPr lang="en-US" smtClean="0"/>
-              <a:t>2/22/24</a:t>
+              <a:t>10/6/25</a:t>
             </a:fld>
             <a:endParaRPr lang="en-US"/>
           </a:p>
@@ -2924,7 +2924,7 @@
           <a:p>
             <a:fld id="{9348304A-BD4A-884F-8142-E1638F7E50E4}" type="datetimeFigureOut">
               <a:rPr lang="en-US" smtClean="0"/>
-              <a:t>2/22/24</a:t>
+              <a:t>10/6/25</a:t>
             </a:fld>
             <a:endParaRPr lang="en-US"/>
           </a:p>
@@ -3419,13 +3419,8 @@
           <a:p>
             <a:r>
               <a:rPr lang="en-US" dirty="0"/>
-              <a:t>with contributions from Vanessa </a:t>
-            </a:r>
-            <a:r>
-              <a:rPr lang="en-US" dirty="0" err="1"/>
-              <a:t>Lobue</a:t>
-            </a:r>
-            <a:endParaRPr lang="en-US" dirty="0"/>
+              <a:t>with help from Vanessa Lobue</a:t>
+            </a:r>
           </a:p>
         </p:txBody>
       </p:sp>
@@ -5932,7 +5927,7 @@
         </p:blipFill>
         <p:spPr>
           <a:xfrm>
-            <a:off x="690034" y="1703915"/>
+            <a:off x="690034" y="2105700"/>
             <a:ext cx="4711700" cy="2823423"/>
           </a:xfrm>
           <a:prstGeom prst="rect">
@@ -6228,7 +6223,7 @@
         </p:blipFill>
         <p:spPr>
           <a:xfrm>
-            <a:off x="1709925" y="1850705"/>
+            <a:off x="1709925" y="2252490"/>
             <a:ext cx="8772150" cy="4633178"/>
           </a:xfrm>
           <a:prstGeom prst="rect">

--- a/lecture-slides_upload/lab-activity/6-LinReg-output.pptx
+++ b/lecture-slides_upload/lab-activity/6-LinReg-output.pptx
@@ -20,7 +20,9 @@
     <p:sldId id="267" r:id="rId14"/>
     <p:sldId id="272" r:id="rId15"/>
     <p:sldId id="273" r:id="rId16"/>
-    <p:sldId id="265" r:id="rId17"/>
+    <p:sldId id="274" r:id="rId17"/>
+    <p:sldId id="276" r:id="rId18"/>
+    <p:sldId id="275" r:id="rId19"/>
   </p:sldIdLst>
   <p:sldSz cx="12192000" cy="6858000"/>
   <p:notesSz cx="6858000" cy="9144000"/>
@@ -274,7 +276,7 @@
           <a:p>
             <a:fld id="{9348304A-BD4A-884F-8142-E1638F7E50E4}" type="datetimeFigureOut">
               <a:rPr lang="en-US" smtClean="0"/>
-              <a:t>10/6/25</a:t>
+              <a:t>10/7/25</a:t>
             </a:fld>
             <a:endParaRPr lang="en-US"/>
           </a:p>
@@ -472,7 +474,7 @@
           <a:p>
             <a:fld id="{9348304A-BD4A-884F-8142-E1638F7E50E4}" type="datetimeFigureOut">
               <a:rPr lang="en-US" smtClean="0"/>
-              <a:t>10/6/25</a:t>
+              <a:t>10/7/25</a:t>
             </a:fld>
             <a:endParaRPr lang="en-US"/>
           </a:p>
@@ -680,7 +682,7 @@
           <a:p>
             <a:fld id="{9348304A-BD4A-884F-8142-E1638F7E50E4}" type="datetimeFigureOut">
               <a:rPr lang="en-US" smtClean="0"/>
-              <a:t>10/6/25</a:t>
+              <a:t>10/7/25</a:t>
             </a:fld>
             <a:endParaRPr lang="en-US"/>
           </a:p>
@@ -878,7 +880,7 @@
           <a:p>
             <a:fld id="{9348304A-BD4A-884F-8142-E1638F7E50E4}" type="datetimeFigureOut">
               <a:rPr lang="en-US" smtClean="0"/>
-              <a:t>10/6/25</a:t>
+              <a:t>10/7/25</a:t>
             </a:fld>
             <a:endParaRPr lang="en-US"/>
           </a:p>
@@ -1153,7 +1155,7 @@
           <a:p>
             <a:fld id="{9348304A-BD4A-884F-8142-E1638F7E50E4}" type="datetimeFigureOut">
               <a:rPr lang="en-US" smtClean="0"/>
-              <a:t>10/6/25</a:t>
+              <a:t>10/7/25</a:t>
             </a:fld>
             <a:endParaRPr lang="en-US"/>
           </a:p>
@@ -1418,7 +1420,7 @@
           <a:p>
             <a:fld id="{9348304A-BD4A-884F-8142-E1638F7E50E4}" type="datetimeFigureOut">
               <a:rPr lang="en-US" smtClean="0"/>
-              <a:t>10/6/25</a:t>
+              <a:t>10/7/25</a:t>
             </a:fld>
             <a:endParaRPr lang="en-US"/>
           </a:p>
@@ -1830,7 +1832,7 @@
           <a:p>
             <a:fld id="{9348304A-BD4A-884F-8142-E1638F7E50E4}" type="datetimeFigureOut">
               <a:rPr lang="en-US" smtClean="0"/>
-              <a:t>10/6/25</a:t>
+              <a:t>10/7/25</a:t>
             </a:fld>
             <a:endParaRPr lang="en-US"/>
           </a:p>
@@ -1971,7 +1973,7 @@
           <a:p>
             <a:fld id="{9348304A-BD4A-884F-8142-E1638F7E50E4}" type="datetimeFigureOut">
               <a:rPr lang="en-US" smtClean="0"/>
-              <a:t>10/6/25</a:t>
+              <a:t>10/7/25</a:t>
             </a:fld>
             <a:endParaRPr lang="en-US"/>
           </a:p>
@@ -2084,7 +2086,7 @@
           <a:p>
             <a:fld id="{9348304A-BD4A-884F-8142-E1638F7E50E4}" type="datetimeFigureOut">
               <a:rPr lang="en-US" smtClean="0"/>
-              <a:t>10/6/25</a:t>
+              <a:t>10/7/25</a:t>
             </a:fld>
             <a:endParaRPr lang="en-US"/>
           </a:p>
@@ -2395,7 +2397,7 @@
           <a:p>
             <a:fld id="{9348304A-BD4A-884F-8142-E1638F7E50E4}" type="datetimeFigureOut">
               <a:rPr lang="en-US" smtClean="0"/>
-              <a:t>10/6/25</a:t>
+              <a:t>10/7/25</a:t>
             </a:fld>
             <a:endParaRPr lang="en-US"/>
           </a:p>
@@ -2683,7 +2685,7 @@
           <a:p>
             <a:fld id="{9348304A-BD4A-884F-8142-E1638F7E50E4}" type="datetimeFigureOut">
               <a:rPr lang="en-US" smtClean="0"/>
-              <a:t>10/6/25</a:t>
+              <a:t>10/7/25</a:t>
             </a:fld>
             <a:endParaRPr lang="en-US"/>
           </a:p>
@@ -2924,7 +2926,7 @@
           <a:p>
             <a:fld id="{9348304A-BD4A-884F-8142-E1638F7E50E4}" type="datetimeFigureOut">
               <a:rPr lang="en-US" smtClean="0"/>
-              <a:t>10/6/25</a:t>
+              <a:t>10/7/25</a:t>
             </a:fld>
             <a:endParaRPr lang="en-US"/>
           </a:p>
@@ -5751,10 +5753,38 @@
       </p:grpSpPr>
       <p:sp>
         <p:nvSpPr>
+          <p:cNvPr id="2" name="Title 1">
+            <a:extLst>
+              <a:ext uri="{FF2B5EF4-FFF2-40B4-BE49-F238E27FC236}">
+                <a16:creationId xmlns:a16="http://schemas.microsoft.com/office/drawing/2014/main" id="{C19FDC9C-DE2D-02B8-ED7A-C09EEC4E925C}"/>
+              </a:ext>
+            </a:extLst>
+          </p:cNvPr>
+          <p:cNvSpPr>
+            <a:spLocks noGrp="1"/>
+          </p:cNvSpPr>
+          <p:nvPr>
+            <p:ph type="title"/>
+          </p:nvPr>
+        </p:nvSpPr>
+        <p:spPr/>
+        <p:txBody>
+          <a:bodyPr/>
+          <a:lstStyle/>
+          <a:p>
+            <a:r>
+              <a:rPr lang="en-US" dirty="0"/>
+              <a:t>Notes from today</a:t>
+            </a:r>
+          </a:p>
+        </p:txBody>
+      </p:sp>
+      <p:sp>
+        <p:nvSpPr>
           <p:cNvPr id="3" name="Content Placeholder 2">
             <a:extLst>
               <a:ext uri="{FF2B5EF4-FFF2-40B4-BE49-F238E27FC236}">
-                <a16:creationId xmlns:a16="http://schemas.microsoft.com/office/drawing/2014/main" id="{CC479728-5232-3443-8117-092035C4884A}"/>
+                <a16:creationId xmlns:a16="http://schemas.microsoft.com/office/drawing/2014/main" id="{CE3A0C13-E9C7-BADE-2CD1-E7ACE80E9A5C}"/>
               </a:ext>
             </a:extLst>
           </p:cNvPr>
@@ -5772,13 +5802,46 @@
           <a:p>
             <a:r>
               <a:rPr lang="en-US" dirty="0"/>
+              <a:t>F stat model, error </a:t>
+            </a:r>
+            <a:r>
+              <a:rPr lang="en-US" dirty="0" err="1"/>
+              <a:t>df</a:t>
+            </a:r>
+            <a:r>
+              <a:rPr lang="en-US" dirty="0"/>
+              <a:t> – signal/noise</a:t>
+            </a:r>
+          </a:p>
+          <a:p>
+            <a:r>
+              <a:rPr lang="en-US" dirty="0"/>
+              <a:t>Adding predictors always increases fit – AIC, BIC</a:t>
+            </a:r>
+          </a:p>
+          <a:p>
+            <a:pPr lvl="1"/>
+            <a:r>
+              <a:rPr lang="en-US" dirty="0"/>
+              <a:t>“fitting the noise” </a:t>
+            </a:r>
+          </a:p>
+          <a:p>
+            <a:r>
+              <a:rPr lang="en-US" dirty="0"/>
+              <a:t>Collinearity when adding higher order terms</a:t>
+            </a:r>
+          </a:p>
+          <a:p>
+            <a:r>
+              <a:rPr lang="en-US" dirty="0"/>
+              <a:t>Common errors: selecting cases</a:t>
+            </a:r>
+          </a:p>
+          <a:p>
+            <a:r>
+              <a:rPr lang="en-US" dirty="0"/>
               <a:t>DV/IV (assigning predictor vs outcome doesn’t determine causation)</a:t>
-            </a:r>
-          </a:p>
-          <a:p>
-            <a:r>
-              <a:rPr lang="en-US" dirty="0"/>
-              <a:t>fitting the noise </a:t>
             </a:r>
           </a:p>
           <a:p>
@@ -5824,6 +5887,9 @@
               <a:rPr lang="en-US" dirty="0"/>
               <a:t>()</a:t>
             </a:r>
+          </a:p>
+          <a:p>
+            <a:endParaRPr lang="en-US" dirty="0"/>
           </a:p>
           <a:p>
             <a:endParaRPr lang="en-US" dirty="0"/>
@@ -5833,7 +5899,144 @@
     </p:spTree>
     <p:extLst>
       <p:ext uri="{BB962C8B-B14F-4D97-AF65-F5344CB8AC3E}">
-        <p14:creationId xmlns:p14="http://schemas.microsoft.com/office/powerpoint/2010/main" val="2921783411"/>
+        <p14:creationId xmlns:p14="http://schemas.microsoft.com/office/powerpoint/2010/main" val="1093025850"/>
+      </p:ext>
+    </p:extLst>
+  </p:cSld>
+  <p:clrMapOvr>
+    <a:masterClrMapping/>
+  </p:clrMapOvr>
+</p:sld>
+</file>
+
+<file path=ppt/slides/slide17.xml><?xml version="1.0" encoding="utf-8"?>
+<p:sld xmlns:a="http://schemas.openxmlformats.org/drawingml/2006/main" xmlns:r="http://schemas.openxmlformats.org/officeDocument/2006/relationships" xmlns:p="http://schemas.openxmlformats.org/presentationml/2006/main">
+  <p:cSld>
+    <p:spTree>
+      <p:nvGrpSpPr>
+        <p:cNvPr id="1" name=""/>
+        <p:cNvGrpSpPr/>
+        <p:nvPr/>
+      </p:nvGrpSpPr>
+      <p:grpSpPr>
+        <a:xfrm>
+          <a:off x="0" y="0"/>
+          <a:ext cx="0" cy="0"/>
+          <a:chOff x="0" y="0"/>
+          <a:chExt cx="0" cy="0"/>
+        </a:xfrm>
+      </p:grpSpPr>
+      <p:pic>
+        <p:nvPicPr>
+          <p:cNvPr id="1026" name="Picture 2" descr="F distribution">
+            <a:extLst>
+              <a:ext uri="{FF2B5EF4-FFF2-40B4-BE49-F238E27FC236}">
+                <a16:creationId xmlns:a16="http://schemas.microsoft.com/office/drawing/2014/main" id="{830748CF-E08A-DBB4-152C-2141103BECF7}"/>
+              </a:ext>
+            </a:extLst>
+          </p:cNvPr>
+          <p:cNvPicPr>
+            <a:picLocks noChangeAspect="1" noChangeArrowheads="1"/>
+          </p:cNvPicPr>
+          <p:nvPr/>
+        </p:nvPicPr>
+        <p:blipFill>
+          <a:blip r:embed="rId2">
+            <a:extLst>
+              <a:ext uri="{28A0092B-C50C-407E-A947-70E740481C1C}">
+                <a14:useLocalDpi xmlns:a14="http://schemas.microsoft.com/office/drawing/2010/main" val="0"/>
+              </a:ext>
+            </a:extLst>
+          </a:blip>
+          <a:srcRect/>
+          <a:stretch>
+            <a:fillRect/>
+          </a:stretch>
+        </p:blipFill>
+        <p:spPr bwMode="auto">
+          <a:xfrm>
+            <a:off x="2844800" y="177800"/>
+            <a:ext cx="6502400" cy="6502400"/>
+          </a:xfrm>
+          <a:prstGeom prst="rect">
+            <a:avLst/>
+          </a:prstGeom>
+          <a:noFill/>
+          <a:extLst>
+            <a:ext uri="{909E8E84-426E-40DD-AFC4-6F175D3DCCD1}">
+              <a14:hiddenFill xmlns:a14="http://schemas.microsoft.com/office/drawing/2010/main">
+                <a:solidFill>
+                  <a:srgbClr val="FFFFFF"/>
+                </a:solidFill>
+              </a14:hiddenFill>
+            </a:ext>
+          </a:extLst>
+        </p:spPr>
+      </p:pic>
+    </p:spTree>
+    <p:extLst>
+      <p:ext uri="{BB962C8B-B14F-4D97-AF65-F5344CB8AC3E}">
+        <p14:creationId xmlns:p14="http://schemas.microsoft.com/office/powerpoint/2010/main" val="2202039429"/>
+      </p:ext>
+    </p:extLst>
+  </p:cSld>
+  <p:clrMapOvr>
+    <a:masterClrMapping/>
+  </p:clrMapOvr>
+</p:sld>
+</file>
+
+<file path=ppt/slides/slide18.xml><?xml version="1.0" encoding="utf-8"?>
+<p:sld xmlns:a="http://schemas.openxmlformats.org/drawingml/2006/main" xmlns:r="http://schemas.openxmlformats.org/officeDocument/2006/relationships" xmlns:p="http://schemas.openxmlformats.org/presentationml/2006/main">
+  <p:cSld>
+    <p:spTree>
+      <p:nvGrpSpPr>
+        <p:cNvPr id="1" name=""/>
+        <p:cNvGrpSpPr/>
+        <p:nvPr/>
+      </p:nvGrpSpPr>
+      <p:grpSpPr>
+        <a:xfrm>
+          <a:off x="0" y="0"/>
+          <a:ext cx="0" cy="0"/>
+          <a:chOff x="0" y="0"/>
+          <a:chExt cx="0" cy="0"/>
+        </a:xfrm>
+      </p:grpSpPr>
+      <p:pic>
+        <p:nvPicPr>
+          <p:cNvPr id="5" name="Picture 4" descr="A diagram of a graph&#10;&#10;AI-generated content may be incorrect.">
+            <a:extLst>
+              <a:ext uri="{FF2B5EF4-FFF2-40B4-BE49-F238E27FC236}">
+                <a16:creationId xmlns:a16="http://schemas.microsoft.com/office/drawing/2014/main" id="{79F162B1-43C8-0B06-08D9-69DBCC28804D}"/>
+              </a:ext>
+            </a:extLst>
+          </p:cNvPr>
+          <p:cNvPicPr>
+            <a:picLocks noChangeAspect="1"/>
+          </p:cNvPicPr>
+          <p:nvPr/>
+        </p:nvPicPr>
+        <p:blipFill>
+          <a:blip r:embed="rId2"/>
+          <a:stretch>
+            <a:fillRect/>
+          </a:stretch>
+        </p:blipFill>
+        <p:spPr>
+          <a:xfrm>
+            <a:off x="2959100" y="0"/>
+            <a:ext cx="6273800" cy="6858000"/>
+          </a:xfrm>
+          <a:prstGeom prst="rect">
+            <a:avLst/>
+          </a:prstGeom>
+        </p:spPr>
+      </p:pic>
+    </p:spTree>
+    <p:extLst>
+      <p:ext uri="{BB962C8B-B14F-4D97-AF65-F5344CB8AC3E}">
+        <p14:creationId xmlns:p14="http://schemas.microsoft.com/office/powerpoint/2010/main" val="4165378635"/>
       </p:ext>
     </p:extLst>
   </p:cSld>
